--- a/goai-agent-infra/ppt/GOAI初赛-家装全流程多Agent协同系统.pptx
+++ b/goai-agent-infra/ppt/GOAI初赛-家装全流程多Agent协同系统.pptx
@@ -2506,7 +2506,7 @@
                 <a:ea typeface="Microsoft YaHei" pitchFamily="34" charset="-122"/>
                 <a:cs typeface="Microsoft YaHei" pitchFamily="34" charset="-120"/>
               </a:rPr>
-              <a:t>658 条 API 路由</a:t>
+              <a:t>75 个 API 路由模块</a:t>
             </a:r>
             <a:endParaRPr lang="en-US" sz="1500" dirty="0"/>
           </a:p>
@@ -2545,7 +2545,7 @@
                 <a:ea typeface="Microsoft YaHei" pitchFamily="34" charset="-122"/>
                 <a:cs typeface="Microsoft YaHei" pitchFamily="34" charset="-120"/>
               </a:rPr>
-              <a:t>73 个模块 · 121 ORM · 95 Service</a:t>
+              <a:t>129 ORM · 105 Service</a:t>
             </a:r>
             <a:endParaRPr lang="en-US" sz="1050" dirty="0"/>
           </a:p>
@@ -2834,7 +2834,7 @@
                 <a:ea typeface="Microsoft YaHei" pitchFamily="34" charset="-122"/>
                 <a:cs typeface="Microsoft YaHei" pitchFamily="34" charset="-120"/>
               </a:rPr>
-              <a:t>队伍:索克家居 · i-home.life ｜ AgentTeams(开源 Hiclaw)× i-home.life v1.8.0(生产运行)</a:t>
+              <a:t>队伍:索克家居 · i-home.life ｜ AgentTeams(开源 Hiclaw)× i-home.life v1.13.5(生产运行)</a:t>
             </a:r>
             <a:endParaRPr lang="en-US" sz="1200" dirty="0"/>
           </a:p>
@@ -2873,7 +2873,7 @@
                 <a:ea typeface="Microsoft YaHei" pitchFamily="34" charset="-122"/>
                 <a:cs typeface="Microsoft YaHei" pitchFamily="34" charset="-120"/>
               </a:rPr>
-              <a:t>2026 · 初赛 V3.2(基于真实能力全景 + 2026 技术对齐 + 前沿增量)</a:t>
+              <a:t>2026 · 初赛 V4.1(基于真实能力全景 v1.13.5 + 2026 最新技术对齐 + 生产级 Agent 工程闭环)</a:t>
             </a:r>
             <a:endParaRPr lang="en-US" sz="1100" dirty="0"/>
           </a:p>
@@ -8726,7 +8726,7 @@
                 <a:ea typeface="Microsoft YaHei" pitchFamily="34" charset="-122"/>
                 <a:cs typeface="Microsoft YaHei" pitchFamily="34" charset="-120"/>
               </a:rPr>
-              <a:t>•  i-home.life v1.8.0(FastAPI · 阿里云 FC 3.0,架构红线:禁 K8s)</a:t>
+              <a:t>•  i-home.life v1.13.5(FastAPI · 阿里云 FC 3.0,架构红线:禁 K8s)</a:t>
             </a:r>
             <a:endParaRPr lang="en-US" sz="1050" dirty="0"/>
           </a:p>
@@ -8804,7 +8804,7 @@
                 <a:ea typeface="Microsoft YaHei" pitchFamily="34" charset="-122"/>
                 <a:cs typeface="Microsoft YaHei" pitchFamily="34" charset="-120"/>
               </a:rPr>
-              <a:t>•  演示数据:120 平三居 · 预算 ¥157,250 · 4 施工任务</a:t>
+              <a:t>•  演示数据:3 模拟项目(云栖雅苑 126㎡ 施工中 / 滇池湖畔 / 翠湖名邸),预算 ¥106,214 可逐项核对</a:t>
             </a:r>
             <a:endParaRPr lang="en-US" sz="1050" dirty="0"/>
           </a:p>
@@ -10331,7 +10331,7 @@
                 <a:ea typeface="Microsoft YaHei" pitchFamily="34" charset="-122"/>
                 <a:cs typeface="Microsoft YaHei" pitchFamily="34" charset="-120"/>
               </a:rPr>
-              <a:t>协议 Apache-2.0(与 AgentTeams 兼容)｜ 披露:LLM 商业 API(deepseek/qwen/glm/doubao)· 第三方依赖 · 数据授权边界 ｜ 已有项目基础:i-home.life(658 路由 / 121 模型 / 25 Agent / 95 Service)</a:t>
+              <a:t>协议 Apache-2.0(与 AgentTeams 兼容)｜ 披露:LLM 商业 API(deepseek/qwen/glm/doubao)· 第三方依赖 · 数据授权边界 ｜ 已有项目基础:i-home.life(75 路由模块 / 129 模型 / 25 Agent / 105 Service)</a:t>
             </a:r>
             <a:endParaRPr lang="en-US" sz="1050" dirty="0"/>
           </a:p>
@@ -10726,7 +10726,7 @@
                 <a:ea typeface="Microsoft YaHei" pitchFamily="34" charset="-122"/>
                 <a:cs typeface="Microsoft YaHei" pitchFamily="34" charset="-120"/>
               </a:rPr>
-              <a:t>AgentTeams 部署、Worker 建团、MCP 调用链路 ✅ 已完成(V3.2)</a:t>
+              <a:t>AgentTeams 部署、Worker 建团、MCP 调用链路 ✅ 已完成(V4.1)</a:t>
             </a:r>
             <a:endParaRPr lang="en-US" sz="1000" dirty="0"/>
           </a:p>
@@ -13207,7 +13207,7 @@
                 <a:ea typeface="Microsoft YaHei" pitchFamily="34" charset="-122"/>
                 <a:cs typeface="Microsoft YaHei" pitchFamily="34" charset="-120"/>
               </a:rPr>
-              <a:t>索克差异化定位:不做"效果图工具",而是家装全流程多 Agent 自主协同 + 标准 MCP/A2A 基础设施 —— 真实业务闭环(658 路由/121 模型/25 Agent/95 Service)+ 开放协议 + 可编排协同层(AgentTeams)</a:t>
+              <a:t>索克差异化定位:不做"效果图工具",而是家装全流程多 Agent 自主协同 + 标准 MCP/A2A 基础设施 —— 真实业务闭环(75 路由模块/129 模型/25 Agent/105 Service)+ 开放协议 + 可编排协同层(AgentTeams)</a:t>
             </a:r>
             <a:endParaRPr lang="en-US" sz="1150" dirty="0"/>
           </a:p>
@@ -20195,7 +20195,7 @@
                 <a:ea typeface="Microsoft YaHei" pitchFamily="34" charset="-122"/>
                 <a:cs typeface="Microsoft YaHei" pitchFamily="34" charset="-120"/>
               </a:rPr>
-              <a:t>索克家居能力全景:真实全流程自动化闭环(658 路由实测)</a:t>
+              <a:t>索克家居能力全景:真实全流程自动化闭环(75 路由模块实测)</a:t>
             </a:r>
             <a:endParaRPr lang="en-US" sz="2300" dirty="0"/>
           </a:p>
@@ -20663,7 +20663,7 @@
                 <a:ea typeface="Microsoft YaHei" pitchFamily="34" charset="-122"/>
                 <a:cs typeface="Microsoft YaHei" pitchFamily="34" charset="-120"/>
               </a:rPr>
-              <a:t>Orchestrator 39 意图 + AgentTeams Manager-Workers</a:t>
+              <a:t>Orchestrator 40 意图 + AgentTeams Manager-Workers</a:t>
             </a:r>
             <a:endParaRPr lang="en-US" sz="950" dirty="0"/>
           </a:p>
@@ -21881,7 +21881,7 @@
                 <a:ea typeface="Microsoft YaHei" pitchFamily="34" charset="-122"/>
                 <a:cs typeface="Microsoft YaHei" pitchFamily="34" charset="-120"/>
               </a:rPr>
-              <a:t>* 诚实边界:质检真实 CV 已启用(`real_cv_quality_enabled=True`),不可用时诚实降级到规则 mock 并标注 `cv_mode="mock"`;VR 渲染、AI 渲染 L1/L2 为标注降级;前沿功能(材料溯源 HENF / AI 工地监理 / 局改快装 / 米家生态+L1-L5 / 方案 LLM 深化 / BOM 版本+几何算量)均已实装(实测 658 路由/121 模型/1700+ 测试全绿)</a:t>
+              <a:t>* 诚实边界:质检真实 CV 已启用(`real_cv_quality_enabled=True`),不可用时诚实降级到规则 mock 并标注 `cv_mode="mock"`;VR 渲染、AI 渲染 L1/L2 为标注降级;前沿功能(材料溯源 HENF / AI 工地监理 / 局改快装 / 米家生态+L1-L5 / 方案 LLM 深化 / BOM 版本+几何算量)均已实装(实测 75 路由模块/129 模型/2169 测试基线全绿)</a:t>
             </a:r>
             <a:endParaRPr lang="en-US" sz="1050" dirty="0"/>
           </a:p>
@@ -23162,7 +23162,7 @@
                 <a:ea typeface="Microsoft YaHei" pitchFamily="34" charset="-122"/>
                 <a:cs typeface="Microsoft YaHei" pitchFamily="34" charset="-120"/>
               </a:rPr>
-              <a:t>诚实降级原则:所有前沿功能带 feature flag + 来源标注(db / rule_based / empirical / mock),禁用硬编码假数据 —— 呼应赛题"不伪装能力"与白皮书空间智能(实测 658 路由/121 模型/25 Agent/95 Service)</a:t>
+              <a:t>诚实降级原则:所有前沿功能带 feature flag + 来源标注(db / rule_based / empirical / mock),禁用硬编码假数据 —— 呼应赛题"不伪装能力"与白皮书空间智能(实测 75 路由模块/129 模型/25 Agent/105 Service)</a:t>
             </a:r>
             <a:endParaRPr lang="en-US" sz="1100" dirty="0"/>
           </a:p>
@@ -25048,7 +25048,7 @@
                 <a:ea typeface="Microsoft YaHei" pitchFamily="34" charset="-122"/>
                 <a:cs typeface="Microsoft YaHei" pitchFamily="34" charset="-120"/>
               </a:rPr>
-              <a:t>24 Agent ↔ 9 角色(1 Leader + 8 Worker)</a:t>
+              <a:t>25 Agent ↔ 9 角色(1 Leader + 8 Worker)</a:t>
             </a:r>
             <a:endParaRPr lang="en-US" sz="850" dirty="0"/>
           </a:p>
@@ -25173,7 +25173,7 @@
                 <a:ea typeface="Microsoft YaHei" pitchFamily="34" charset="-122"/>
                 <a:cs typeface="Microsoft YaHei" pitchFamily="34" charset="-120"/>
               </a:rPr>
-              <a:t>39 意图 + Manager 路由 + 多意图并行</a:t>
+              <a:t>40 意图 + Manager 路由 + 多意图并行</a:t>
             </a:r>
             <a:endParaRPr lang="en-US" sz="850" dirty="0"/>
           </a:p>

--- a/goai-agent-infra/ppt/GOAI初赛-家装全流程多Agent协同系统.pptx
+++ b/goai-agent-infra/ppt/GOAI初赛-家装全流程多Agent协同系统.pptx
@@ -21,9 +21,10 @@
     <p:sldId id="269" r:id="rId15"/>
     <p:sldId id="270" r:id="rId16"/>
     <p:sldId id="271" r:id="rId17"/>
+    <p:sldId id="272" r:id="rId18"/>
   </p:sldIdLst>
   <p:notesMasterIdLst>
-    <p:notesMasterId r:id="rId18"/>
+    <p:notesMasterId r:id="rId19"/>
   </p:notesMasterIdLst>
   <p:sldSz cx="12191695" cy="6858000"/>
   <p:notesSz cx="6858000" cy="12191695"/>
@@ -1157,6 +1158,94 @@
             <a:fld id="{F7021451-1387-4CA6-816F-3879F97B5CBC}" type="slidenum">
               <a:rPr lang="en-US"/>
               <a:t>16</a:t>
+            </a:fld>
+            <a:endParaRPr lang="en-US"/>
+          </a:p>
+        </p:txBody>
+      </p:sp>
+    </p:spTree>
+    <p:extLst>
+      <p:ext uri="{BB962C8B-B14F-4D97-AF65-F5344CB8AC3E}">
+        <p14:creationId xmlns:p14="http://schemas.microsoft.com/office/powerpoint/2010/main" val="1024086991"/>
+      </p:ext>
+    </p:extLst>
+  </p:cSld>
+  <p:clrMapOvr>
+    <a:masterClrMapping/>
+  </p:clrMapOvr>
+</p:notes>
+</file>
+
+<file path=ppt/notesSlides/notesSlide17.xml><?xml version="1.0" encoding="utf-8"?>
+<p:notes xmlns:a="http://schemas.openxmlformats.org/drawingml/2006/main" xmlns:r="http://schemas.openxmlformats.org/officeDocument/2006/relationships" xmlns:p="http://schemas.openxmlformats.org/presentationml/2006/main">
+  <p:cSld>
+    <p:spTree>
+      <p:nvGrpSpPr>
+        <p:cNvPr id="1" name=""/>
+        <p:cNvGrpSpPr/>
+        <p:nvPr/>
+      </p:nvGrpSpPr>
+      <p:grpSpPr>
+        <a:xfrm>
+          <a:off x="0" y="0"/>
+          <a:ext cx="0" cy="0"/>
+          <a:chOff x="0" y="0"/>
+          <a:chExt cx="0" cy="0"/>
+        </a:xfrm>
+      </p:grpSpPr>
+      <p:sp>
+        <p:nvSpPr>
+          <p:cNvPr id="2" name="Slide Image Placeholder 1"/>
+          <p:cNvSpPr>
+            <a:spLocks noGrp="1" noRot="1" noChangeAspect="1"/>
+          </p:cNvSpPr>
+          <p:nvPr>
+            <p:ph type="sldImg"/>
+          </p:nvPr>
+        </p:nvSpPr>
+        <p:spPr/>
+      </p:sp>
+      <p:sp>
+        <p:nvSpPr>
+          <p:cNvPr id="3" name="Notes Placeholder 2"/>
+          <p:cNvSpPr>
+            <a:spLocks noGrp="1"/>
+          </p:cNvSpPr>
+          <p:nvPr>
+            <p:ph type="body" idx="1"/>
+          </p:nvPr>
+        </p:nvSpPr>
+        <p:spPr/>
+        <p:txBody>
+          <a:bodyPr/>
+          <a:lstStyle/>
+          <a:p>
+            <a:r>
+              <a:rPr lang="en-US" dirty="0"/>
+              <a:t/>
+            </a:r>
+            <a:endParaRPr lang="en-US" dirty="0"/>
+          </a:p>
+        </p:txBody>
+      </p:sp>
+      <p:sp>
+        <p:nvSpPr>
+          <p:cNvPr id="4" name="Slide Number Placeholder 3"/>
+          <p:cNvSpPr>
+            <a:spLocks noGrp="1"/>
+          </p:cNvSpPr>
+          <p:nvPr>
+            <p:ph type="sldNum" sz="quarter" idx="10"/>
+          </p:nvPr>
+        </p:nvSpPr>
+        <p:spPr/>
+        <p:txBody>
+          <a:bodyPr/>
+          <a:lstStyle/>
+          <a:p>
+            <a:fld id="{F7021451-1387-4CA6-816F-3879F97B5CBC}" type="slidenum">
+              <a:rPr lang="en-US"/>
+              <a:t>17</a:t>
             </a:fld>
             <a:endParaRPr lang="en-US"/>
           </a:p>
@@ -2506,7 +2595,7 @@
                 <a:ea typeface="Microsoft YaHei" pitchFamily="34" charset="-122"/>
                 <a:cs typeface="Microsoft YaHei" pitchFamily="34" charset="-120"/>
               </a:rPr>
-              <a:t>75 个 API 路由模块</a:t>
+              <a:t>80 个 API 路由模块</a:t>
             </a:r>
             <a:endParaRPr lang="en-US" sz="1500" dirty="0"/>
           </a:p>
@@ -2545,7 +2634,7 @@
                 <a:ea typeface="Microsoft YaHei" pitchFamily="34" charset="-122"/>
                 <a:cs typeface="Microsoft YaHei" pitchFamily="34" charset="-120"/>
               </a:rPr>
-              <a:t>129 ORM · 105 Service</a:t>
+              <a:t>140 ORM · 111 Service</a:t>
             </a:r>
             <a:endParaRPr lang="en-US" sz="1050" dirty="0"/>
           </a:p>
@@ -2834,7 +2923,7 @@
                 <a:ea typeface="Microsoft YaHei" pitchFamily="34" charset="-122"/>
                 <a:cs typeface="Microsoft YaHei" pitchFamily="34" charset="-120"/>
               </a:rPr>
-              <a:t>队伍:索克家居 · i-home.life ｜ AgentTeams(开源 Hiclaw)× i-home.life v1.13.5(生产运行)</a:t>
+              <a:t>队伍:索克家居 · i-home.life ｜ AgentTeams(开源 Hiclaw)× i-home.life v1.14.1(生产运行)</a:t>
             </a:r>
             <a:endParaRPr lang="en-US" sz="1200" dirty="0"/>
           </a:p>
@@ -2873,7 +2962,7 @@
                 <a:ea typeface="Microsoft YaHei" pitchFamily="34" charset="-122"/>
                 <a:cs typeface="Microsoft YaHei" pitchFamily="34" charset="-120"/>
               </a:rPr>
-              <a:t>2026 · 初赛 V4.1(基于真实能力全景 v1.13.5 + 2026 最新技术对齐 + 生产级 Agent 工程闭环)</a:t>
+              <a:t>2026 · 初赛 V4.2(基于真实能力全景 v1.14.1 + 2026 最新技术对齐 + 空间数字底座 Robot-Ready Home)</a:t>
             </a:r>
             <a:endParaRPr lang="en-US" sz="1100" dirty="0"/>
           </a:p>
@@ -4666,7 +4755,7 @@
                 <a:ea typeface="Microsoft YaHei" pitchFamily="34" charset="-122"/>
                 <a:cs typeface="Microsoft YaHei" pitchFamily="34" charset="-120"/>
               </a:rPr>
-              <a:t>AAIF 托管 · 8 大 Platinum · SDK 月下载近 5 亿</a:t>
+              <a:t>AAIF 托管 · 8 大 Platinum · SDK 月下载近 1 亿(9700 万)</a:t>
             </a:r>
             <a:endParaRPr lang="en-US" sz="1000" dirty="0"/>
           </a:p>
@@ -5621,7 +5710,7 @@
                 <a:ea typeface="Microsoft YaHei" pitchFamily="34" charset="-122"/>
                 <a:cs typeface="Microsoft YaHei" pitchFamily="34" charset="-120"/>
               </a:rPr>
-              <a:t>SpaceMind(2026-06)/飞流AI 3.1(2026-07)产业化</a:t>
+              <a:t>SpaceMind(2026-06)/飞流AI 3.1(2026-07)/大晓 Kairos-HomeWorld(2026-07)产业化</a:t>
             </a:r>
             <a:endParaRPr lang="en-US" sz="1000" dirty="0"/>
           </a:p>
@@ -5687,7 +5776,7 @@
                 <a:ea typeface="Microsoft YaHei" pitchFamily="34" charset="-122"/>
                 <a:cs typeface="Microsoft YaHei" pitchFamily="34" charset="-120"/>
               </a:rPr>
-              <a:t>✅ 空间感知/推理/交互三能力齐备</a:t>
+              <a:t>✅ 三能力齐备 + Robot-Ready Home 空间数字底座</a:t>
             </a:r>
             <a:endParaRPr lang="en-US" sz="950" dirty="0"/>
           </a:p>
@@ -8726,7 +8815,7 @@
                 <a:ea typeface="Microsoft YaHei" pitchFamily="34" charset="-122"/>
                 <a:cs typeface="Microsoft YaHei" pitchFamily="34" charset="-120"/>
               </a:rPr>
-              <a:t>•  i-home.life v1.13.5(FastAPI · 阿里云 FC 3.0,架构红线:禁 K8s)</a:t>
+              <a:t>•  i-home.life v1.14.1(FastAPI · 阿里云 FC 3.0,架构红线:禁 K8s)</a:t>
             </a:r>
             <a:endParaRPr lang="en-US" sz="1050" dirty="0"/>
           </a:p>
@@ -9026,7 +9115,7 @@
                 <a:ea typeface="Microsoft YaHei" pitchFamily="34" charset="-122"/>
                 <a:cs typeface="Microsoft YaHei" pitchFamily="34" charset="-120"/>
               </a:rPr>
-              <a:t>•  tools/list → 10 个家装工具可发现 ✅</a:t>
+              <a:t>•  tools/list → 11 个家装工具可发现 ✅</a:t>
             </a:r>
             <a:endParaRPr lang="en-US" sz="1050" dirty="0"/>
           </a:p>
@@ -10331,7 +10420,7 @@
                 <a:ea typeface="Microsoft YaHei" pitchFamily="34" charset="-122"/>
                 <a:cs typeface="Microsoft YaHei" pitchFamily="34" charset="-120"/>
               </a:rPr>
-              <a:t>协议 Apache-2.0(与 AgentTeams 兼容)｜ 披露:LLM 商业 API(deepseek/qwen/glm/doubao)· 第三方依赖 · 数据授权边界 ｜ 已有项目基础:i-home.life(75 路由模块 / 129 模型 / 25 Agent / 105 Service)</a:t>
+              <a:t>协议 Apache-2.0(与 AgentTeams 兼容)｜ 披露:LLM 商业 API(deepseek/qwen/glm/doubao)· 第三方依赖 · 数据授权边界 ｜ 已有项目基础:i-home.life(80 路由模块 / 140 模型 / 25 Agent / 111 Service)</a:t>
             </a:r>
             <a:endParaRPr lang="en-US" sz="1050" dirty="0"/>
           </a:p>
@@ -10726,7 +10815,7 @@
                 <a:ea typeface="Microsoft YaHei" pitchFamily="34" charset="-122"/>
                 <a:cs typeface="Microsoft YaHei" pitchFamily="34" charset="-120"/>
               </a:rPr>
-              <a:t>AgentTeams 部署、Worker 建团、MCP 调用链路 ✅ 已完成(V4.1)</a:t>
+              <a:t>AgentTeams 部署、Worker 建团、MCP 调用链路 ✅ 已完成(V4.2)</a:t>
             </a:r>
             <a:endParaRPr lang="en-US" sz="1000" dirty="0"/>
           </a:p>
@@ -11708,6 +11797,379 @@
               <a:t>•  LLM 成本与不可用 → 4 供应商 fallback 链(deepseek→qwen→glm→doubao)+ TTS 3 级链</a:t>
             </a:r>
             <a:endParaRPr lang="en-US" sz="950" dirty="0"/>
+          </a:p>
+        </p:txBody>
+      </p:sp>
+    </p:spTree>
+  </p:cSld>
+  <p:clrMapOvr>
+    <a:masterClrMapping/>
+  </p:clrMapOvr>
+</p:sld>
+</file>
+
+<file path=ppt/slides/slide17.xml><?xml version="1.0" encoding="utf-8"?>
+<p:sld xmlns:a="http://schemas.openxmlformats.org/drawingml/2006/main" xmlns:r="http://schemas.openxmlformats.org/officeDocument/2006/relationships" xmlns:p="http://schemas.openxmlformats.org/presentationml/2006/main">
+  <p:cSld name="Slide 17">
+    <p:bg>
+      <p:bgPr>
+        <a:solidFill>
+          <a:srgbClr val="001833"/>
+        </a:solidFill>
+      </p:bgPr>
+    </p:bg>
+    <p:spTree>
+      <p:nvGrpSpPr>
+        <p:cNvPr id="1" name=""/>
+        <p:cNvGrpSpPr/>
+        <p:nvPr/>
+      </p:nvGrpSpPr>
+      <p:grpSpPr>
+        <a:xfrm>
+          <a:off x="0" y="0"/>
+          <a:ext cx="0" cy="0"/>
+          <a:chOff x="0" y="0"/>
+          <a:chExt cx="0" cy="0"/>
+        </a:xfrm>
+      </p:grpSpPr>
+      <p:sp>
+        <p:nvSpPr>
+          <p:cNvPr id="2" name="Shape 0"/>
+          <p:cNvSpPr/>
+          <p:nvPr/>
+        </p:nvSpPr>
+        <p:spPr>
+          <a:xfrm>
+            <a:off x="10424160" y="-2743200"/>
+            <a:ext cx="3657600" cy="3657600"/>
+          </a:xfrm>
+          <a:prstGeom prst="ellipse">
+            <a:avLst/>
+          </a:prstGeom>
+          <a:solidFill>
+            <a:srgbClr val="003166"/>
+          </a:solidFill>
+          <a:ln/>
+        </p:spPr>
+      </p:sp>
+      <p:sp>
+        <p:nvSpPr>
+          <p:cNvPr id="3" name="Shape 1"/>
+          <p:cNvSpPr/>
+          <p:nvPr/>
+        </p:nvSpPr>
+        <p:spPr>
+          <a:xfrm>
+            <a:off x="-2377440" y="5577840"/>
+            <a:ext cx="2926080" cy="2926080"/>
+          </a:xfrm>
+          <a:prstGeom prst="ellipse">
+            <a:avLst/>
+          </a:prstGeom>
+          <a:solidFill>
+            <a:srgbClr val="003166"/>
+          </a:solidFill>
+          <a:ln/>
+        </p:spPr>
+      </p:sp>
+      <p:sp>
+        <p:nvSpPr>
+          <p:cNvPr id="4" name="Shape 2"/>
+          <p:cNvSpPr/>
+          <p:nvPr/>
+        </p:nvSpPr>
+        <p:spPr>
+          <a:xfrm>
+            <a:off x="0" y="0"/>
+            <a:ext cx="128016" cy="6858000"/>
+          </a:xfrm>
+          <a:prstGeom prst="rect">
+            <a:avLst/>
+          </a:prstGeom>
+          <a:solidFill>
+            <a:srgbClr val="007AFF"/>
+          </a:solidFill>
+          <a:ln/>
+        </p:spPr>
+      </p:sp>
+      <p:pic>
+        <p:nvPicPr>
+          <p:cNvPr id="5" name="Image 0" descr="/Users/netsong/Developer/i-home.life/flutter_app/assets/images/suoke-logo-1024-dark.png">    </p:cNvPr>
+          <p:cNvPicPr>
+            <a:picLocks noChangeAspect="1"/>
+          </p:cNvPicPr>
+          <p:nvPr/>
+        </p:nvPicPr>
+        <p:blipFill>
+          <a:blip r:embed="rId1"/>
+          <a:stretch>
+            <a:fillRect/>
+          </a:stretch>
+        </p:blipFill>
+        <p:spPr>
+          <a:xfrm>
+            <a:off x="5364328" y="1051560"/>
+            <a:ext cx="1463040" cy="1463040"/>
+          </a:xfrm>
+          <a:prstGeom prst="rect">
+            <a:avLst/>
+          </a:prstGeom>
+        </p:spPr>
+      </p:pic>
+      <p:sp>
+        <p:nvSpPr>
+          <p:cNvPr id="6" name="Text 3"/>
+          <p:cNvSpPr/>
+          <p:nvPr/>
+        </p:nvSpPr>
+        <p:spPr>
+          <a:xfrm>
+            <a:off x="822960" y="2743200"/>
+            <a:ext cx="10515600" cy="594360"/>
+          </a:xfrm>
+          <a:prstGeom prst="rect">
+            <a:avLst/>
+          </a:prstGeom>
+          <a:noFill/>
+          <a:ln/>
+        </p:spPr>
+        <p:txBody>
+          <a:bodyPr wrap="square" rtlCol="0" anchor="ctr"/>
+          <a:lstStyle/>
+          <a:p>
+            <a:pPr algn="ctr" indent="0" marL="0">
+              <a:buNone/>
+            </a:pPr>
+            <a:r>
+              <a:rPr lang="en-US" sz="3000" b="1" dirty="0">
+                <a:solidFill>
+                  <a:srgbClr val="FFFFFF"/>
+                </a:solidFill>
+                <a:latin typeface="Microsoft YaHei" pitchFamily="34" charset="0"/>
+                <a:ea typeface="Microsoft YaHei" pitchFamily="34" charset="-122"/>
+                <a:cs typeface="Microsoft YaHei" pitchFamily="34" charset="-120"/>
+              </a:rPr>
+              <a:t>家装全流程多 Agent 协同系统</a:t>
+            </a:r>
+            <a:endParaRPr lang="en-US" sz="3000" dirty="0"/>
+          </a:p>
+        </p:txBody>
+      </p:sp>
+      <p:sp>
+        <p:nvSpPr>
+          <p:cNvPr id="7" name="Text 4"/>
+          <p:cNvSpPr/>
+          <p:nvPr/>
+        </p:nvSpPr>
+        <p:spPr>
+          <a:xfrm>
+            <a:off x="822960" y="3401568"/>
+            <a:ext cx="10515600" cy="365760"/>
+          </a:xfrm>
+          <a:prstGeom prst="rect">
+            <a:avLst/>
+          </a:prstGeom>
+          <a:noFill/>
+          <a:ln/>
+        </p:spPr>
+        <p:txBody>
+          <a:bodyPr wrap="square" rtlCol="0" anchor="ctr"/>
+          <a:lstStyle/>
+          <a:p>
+            <a:pPr algn="ctr" indent="0" marL="0">
+              <a:buNone/>
+            </a:pPr>
+            <a:r>
+              <a:rPr lang="en-US" sz="1350" b="1" spc="200" kern="0" dirty="0">
+                <a:solidFill>
+                  <a:srgbClr val="99C9FF"/>
+                </a:solidFill>
+                <a:latin typeface="Microsoft YaHei" pitchFamily="34" charset="0"/>
+                <a:ea typeface="Microsoft YaHei" pitchFamily="34" charset="-122"/>
+                <a:cs typeface="Microsoft YaHei" pitchFamily="34" charset="-120"/>
+              </a:rPr>
+              <a:t>GOAI 2026 · 赛道一 新智基座 | Agent Infra</a:t>
+            </a:r>
+            <a:endParaRPr lang="en-US" sz="1350" dirty="0"/>
+          </a:p>
+        </p:txBody>
+      </p:sp>
+      <p:sp>
+        <p:nvSpPr>
+          <p:cNvPr id="8" name="Shape 5"/>
+          <p:cNvSpPr/>
+          <p:nvPr/>
+        </p:nvSpPr>
+        <p:spPr>
+          <a:xfrm>
+            <a:off x="5184648" y="4041648"/>
+            <a:ext cx="1828800" cy="0"/>
+          </a:xfrm>
+          <a:prstGeom prst="line">
+            <a:avLst/>
+          </a:prstGeom>
+          <a:noFill/>
+          <a:ln w="12700">
+            <a:solidFill>
+              <a:srgbClr val="0062CC"/>
+            </a:solidFill>
+            <a:prstDash val="solid"/>
+          </a:ln>
+        </p:spPr>
+      </p:sp>
+      <p:sp>
+        <p:nvSpPr>
+          <p:cNvPr id="9" name="Text 6"/>
+          <p:cNvSpPr/>
+          <p:nvPr/>
+        </p:nvSpPr>
+        <p:spPr>
+          <a:xfrm>
+            <a:off x="1371600" y="4407408"/>
+            <a:ext cx="9418320" cy="365760"/>
+          </a:xfrm>
+          <a:prstGeom prst="rect">
+            <a:avLst/>
+          </a:prstGeom>
+          <a:noFill/>
+          <a:ln/>
+        </p:spPr>
+        <p:txBody>
+          <a:bodyPr wrap="square" rtlCol="0" anchor="ctr"/>
+          <a:lstStyle/>
+          <a:p>
+            <a:pPr algn="ctr" indent="0" marL="0">
+              <a:buNone/>
+            </a:pPr>
+            <a:r>
+              <a:rPr lang="en-US" sz="1400" dirty="0">
+                <a:solidFill>
+                  <a:srgbClr val="FFFFFF"/>
+                </a:solidFill>
+                <a:latin typeface="Microsoft YaHei" pitchFamily="34" charset="0"/>
+                <a:ea typeface="Microsoft YaHei" pitchFamily="34" charset="-122"/>
+                <a:cs typeface="Microsoft YaHei" pitchFamily="34" charset="-120"/>
+              </a:rPr>
+              <a:t>团队：徐楠 · 徐松 · DeepSeek-v4-Pro</a:t>
+            </a:r>
+            <a:endParaRPr lang="en-US" sz="1400" dirty="0"/>
+          </a:p>
+        </p:txBody>
+      </p:sp>
+      <p:sp>
+        <p:nvSpPr>
+          <p:cNvPr id="10" name="Text 7"/>
+          <p:cNvSpPr/>
+          <p:nvPr/>
+        </p:nvSpPr>
+        <p:spPr>
+          <a:xfrm>
+            <a:off x="1371600" y="4937760"/>
+            <a:ext cx="9418320" cy="365760"/>
+          </a:xfrm>
+          <a:prstGeom prst="rect">
+            <a:avLst/>
+          </a:prstGeom>
+          <a:noFill/>
+          <a:ln/>
+        </p:spPr>
+        <p:txBody>
+          <a:bodyPr wrap="square" rtlCol="0" anchor="ctr"/>
+          <a:lstStyle/>
+          <a:p>
+            <a:pPr algn="ctr" indent="0" marL="0">
+              <a:buNone/>
+            </a:pPr>
+            <a:r>
+              <a:rPr lang="en-US" sz="1400" dirty="0">
+                <a:solidFill>
+                  <a:srgbClr val="FFFFFF"/>
+                </a:solidFill>
+                <a:latin typeface="Microsoft YaHei" pitchFamily="34" charset="0"/>
+                <a:ea typeface="Microsoft YaHei" pitchFamily="34" charset="-122"/>
+                <a:cs typeface="Microsoft YaHei" pitchFamily="34" charset="-120"/>
+              </a:rPr>
+              <a:t>邮箱：272916485@qq.com</a:t>
+            </a:r>
+            <a:endParaRPr lang="en-US" sz="1400" dirty="0"/>
+          </a:p>
+        </p:txBody>
+      </p:sp>
+      <p:sp>
+        <p:nvSpPr>
+          <p:cNvPr id="11" name="Text 8"/>
+          <p:cNvSpPr/>
+          <p:nvPr/>
+        </p:nvSpPr>
+        <p:spPr>
+          <a:xfrm>
+            <a:off x="1371600" y="5468112"/>
+            <a:ext cx="9418320" cy="365760"/>
+          </a:xfrm>
+          <a:prstGeom prst="rect">
+            <a:avLst/>
+          </a:prstGeom>
+          <a:noFill/>
+          <a:ln/>
+        </p:spPr>
+        <p:txBody>
+          <a:bodyPr wrap="square" rtlCol="0" anchor="ctr"/>
+          <a:lstStyle/>
+          <a:p>
+            <a:pPr algn="ctr" indent="0" marL="0">
+              <a:buNone/>
+            </a:pPr>
+            <a:r>
+              <a:rPr lang="en-US" sz="1400" dirty="0">
+                <a:solidFill>
+                  <a:srgbClr val="FFFFFF"/>
+                </a:solidFill>
+                <a:latin typeface="Microsoft YaHei" pitchFamily="34" charset="0"/>
+                <a:ea typeface="Microsoft YaHei" pitchFamily="34" charset="-122"/>
+                <a:cs typeface="Microsoft YaHei" pitchFamily="34" charset="-120"/>
+              </a:rPr>
+              <a:t>在线 Demo：https://i-home.life</a:t>
+            </a:r>
+            <a:endParaRPr lang="en-US" sz="1400" dirty="0"/>
+          </a:p>
+        </p:txBody>
+      </p:sp>
+      <p:sp>
+        <p:nvSpPr>
+          <p:cNvPr id="12" name="Text 9"/>
+          <p:cNvSpPr/>
+          <p:nvPr/>
+        </p:nvSpPr>
+        <p:spPr>
+          <a:xfrm>
+            <a:off x="822960" y="6172200"/>
+            <a:ext cx="10515600" cy="320040"/>
+          </a:xfrm>
+          <a:prstGeom prst="rect">
+            <a:avLst/>
+          </a:prstGeom>
+          <a:noFill/>
+          <a:ln/>
+        </p:spPr>
+        <p:txBody>
+          <a:bodyPr wrap="square" rtlCol="0" anchor="ctr"/>
+          <a:lstStyle/>
+          <a:p>
+            <a:pPr algn="ctr" indent="0" marL="0">
+              <a:buNone/>
+            </a:pPr>
+            <a:r>
+              <a:rPr lang="en-US" sz="1100" dirty="0">
+                <a:solidFill>
+                  <a:srgbClr val="66ADFF"/>
+                </a:solidFill>
+                <a:latin typeface="Microsoft YaHei" pitchFamily="34" charset="0"/>
+                <a:ea typeface="Microsoft YaHei" pitchFamily="34" charset="-122"/>
+                <a:cs typeface="Microsoft YaHei" pitchFamily="34" charset="-120"/>
+              </a:rPr>
+              <a:t>索克家居 · i-home.life</a:t>
+            </a:r>
+            <a:endParaRPr lang="en-US" sz="1100" dirty="0"/>
           </a:p>
         </p:txBody>
       </p:sp>
@@ -13207,7 +13669,7 @@
                 <a:ea typeface="Microsoft YaHei" pitchFamily="34" charset="-122"/>
                 <a:cs typeface="Microsoft YaHei" pitchFamily="34" charset="-120"/>
               </a:rPr>
-              <a:t>索克差异化定位:不做"效果图工具",而是家装全流程多 Agent 自主协同 + 标准 MCP/A2A 基础设施 —— 真实业务闭环(75 路由模块/129 模型/25 Agent/105 Service)+ 开放协议 + 可编排协同层(AgentTeams)</a:t>
+              <a:t>索克差异化定位:不做"效果图工具",而是家装全流程多 Agent 自主协同 + 标准 MCP/A2A 基础设施 —— 真实业务闭环(80 路由模块/140 模型/25 Agent/111 Service)+ 开放协议 + 可编排协同层(AgentTeams)</a:t>
             </a:r>
             <a:endParaRPr lang="en-US" sz="1150" dirty="0"/>
           </a:p>
@@ -20195,7 +20657,7 @@
                 <a:ea typeface="Microsoft YaHei" pitchFamily="34" charset="-122"/>
                 <a:cs typeface="Microsoft YaHei" pitchFamily="34" charset="-120"/>
               </a:rPr>
-              <a:t>索克家居能力全景:真实全流程自动化闭环(75 路由模块实测)</a:t>
+              <a:t>索克家居能力全景:真实全流程自动化闭环(80 路由模块实测)</a:t>
             </a:r>
             <a:endParaRPr lang="en-US" sz="2300" dirty="0"/>
           </a:p>
@@ -21881,7 +22343,7 @@
                 <a:ea typeface="Microsoft YaHei" pitchFamily="34" charset="-122"/>
                 <a:cs typeface="Microsoft YaHei" pitchFamily="34" charset="-120"/>
               </a:rPr>
-              <a:t>* 诚实边界:质检真实 CV 已启用(`real_cv_quality_enabled=True`),不可用时诚实降级到规则 mock 并标注 `cv_mode="mock"`;VR 渲染、AI 渲染 L1/L2 为标注降级;前沿功能(材料溯源 HENF / AI 工地监理 / 局改快装 / 米家生态+L1-L5 / 方案 LLM 深化 / BOM 版本+几何算量)均已实装(实测 75 路由模块/129 模型/2169 测试基线全绿)</a:t>
+              <a:t>* 诚实边界:质检真实 CV 已启用(`real_cv_quality_enabled=True`),不可用时诚实降级到规则 mock 并标注 `cv_mode="mock"`;VR 渲染、AI 渲染 L1/L2 为标注降级;前沿功能(材料溯源 HENF / AI 工地监理 / 局改快装 / 米家生态+L1-L5 / 方案 LLM 深化 / BOM 版本+几何算量)均已实装(实测 80 路由模块/140 模型/2442 测试基线全绿)</a:t>
             </a:r>
             <a:endParaRPr lang="en-US" sz="1050" dirty="0"/>
           </a:p>
@@ -23162,7 +23624,7 @@
                 <a:ea typeface="Microsoft YaHei" pitchFamily="34" charset="-122"/>
                 <a:cs typeface="Microsoft YaHei" pitchFamily="34" charset="-120"/>
               </a:rPr>
-              <a:t>诚实降级原则:所有前沿功能带 feature flag + 来源标注(db / rule_based / empirical / mock),禁用硬编码假数据 —— 呼应赛题"不伪装能力"与白皮书空间智能(实测 75 路由模块/129 模型/25 Agent/105 Service)</a:t>
+              <a:t>诚实降级原则:所有前沿功能带 feature flag + 来源标注(db / rule_based / empirical / mock),禁用硬编码假数据 —— 呼应赛题"不伪装能力"与白皮书空间智能(实测 80 路由模块/140 模型/25 Agent/111 Service)</a:t>
             </a:r>
             <a:endParaRPr lang="en-US" sz="1100" dirty="0"/>
           </a:p>

--- a/goai-agent-infra/ppt/GOAI初赛-家装全流程多Agent协同系统.pptx
+++ b/goai-agent-infra/ppt/GOAI初赛-家装全流程多Agent协同系统.pptx
@@ -2634,7 +2634,7 @@
                 <a:ea typeface="Microsoft YaHei" pitchFamily="34" charset="-122"/>
                 <a:cs typeface="Microsoft YaHei" pitchFamily="34" charset="-120"/>
               </a:rPr>
-              <a:t>140 ORM · 111 Service</a:t>
+              <a:t>140 ORM · 112 Service</a:t>
             </a:r>
             <a:endParaRPr lang="en-US" sz="1050" dirty="0"/>
           </a:p>
@@ -2923,7 +2923,7 @@
                 <a:ea typeface="Microsoft YaHei" pitchFamily="34" charset="-122"/>
                 <a:cs typeface="Microsoft YaHei" pitchFamily="34" charset="-120"/>
               </a:rPr>
-              <a:t>队伍:索克家居 · i-home.life ｜ AgentTeams(开源 Hiclaw)× i-home.life v1.14.1(生产运行)</a:t>
+              <a:t>队伍:索克家居 · i-home.life ｜ AgentTeams(开源 Hiclaw)× i-home.life v1.15.0(生产运行)</a:t>
             </a:r>
             <a:endParaRPr lang="en-US" sz="1200" dirty="0"/>
           </a:p>
@@ -2962,7 +2962,7 @@
                 <a:ea typeface="Microsoft YaHei" pitchFamily="34" charset="-122"/>
                 <a:cs typeface="Microsoft YaHei" pitchFamily="34" charset="-120"/>
               </a:rPr>
-              <a:t>2026 · 初赛 V4.2(基于真实能力全景 v1.14.1 + 2026 最新技术对齐 + 空间数字底座 Robot-Ready Home)</a:t>
+              <a:t>2026 · 初赛 V4.2(基于真实能力全景 v1.15.0 + 2026 最新技术对齐 + 空间数字底座 Robot-Ready Home)</a:t>
             </a:r>
             <a:endParaRPr lang="en-US" sz="1100" dirty="0"/>
           </a:p>
@@ -8815,7 +8815,7 @@
                 <a:ea typeface="Microsoft YaHei" pitchFamily="34" charset="-122"/>
                 <a:cs typeface="Microsoft YaHei" pitchFamily="34" charset="-120"/>
               </a:rPr>
-              <a:t>•  i-home.life v1.14.1(FastAPI · 阿里云 FC 3.0,架构红线:禁 K8s)</a:t>
+              <a:t>•  i-home.life v1.15.0(FastAPI · 阿里云 FC 3.0,架构红线:禁 K8s)</a:t>
             </a:r>
             <a:endParaRPr lang="en-US" sz="1050" dirty="0"/>
           </a:p>
@@ -10420,7 +10420,7 @@
                 <a:ea typeface="Microsoft YaHei" pitchFamily="34" charset="-122"/>
                 <a:cs typeface="Microsoft YaHei" pitchFamily="34" charset="-120"/>
               </a:rPr>
-              <a:t>协议 Apache-2.0(与 AgentTeams 兼容)｜ 披露:LLM 商业 API(deepseek/qwen/glm/doubao)· 第三方依赖 · 数据授权边界 ｜ 已有项目基础:i-home.life(80 路由模块 / 140 模型 / 25 Agent / 111 Service)</a:t>
+              <a:t>协议 Apache-2.0(与 AgentTeams 兼容)｜ 披露:LLM 商业 API(deepseek/qwen/glm/doubao)· 第三方依赖 · 数据授权边界 ｜ 已有项目基础:i-home.life(80 路由模块 / 140 模型 / 25 Agent / 112 Service)</a:t>
             </a:r>
             <a:endParaRPr lang="en-US" sz="1050" dirty="0"/>
           </a:p>
@@ -13669,7 +13669,7 @@
                 <a:ea typeface="Microsoft YaHei" pitchFamily="34" charset="-122"/>
                 <a:cs typeface="Microsoft YaHei" pitchFamily="34" charset="-120"/>
               </a:rPr>
-              <a:t>索克差异化定位:不做"效果图工具",而是家装全流程多 Agent 自主协同 + 标准 MCP/A2A 基础设施 —— 真实业务闭环(80 路由模块/140 模型/25 Agent/111 Service)+ 开放协议 + 可编排协同层(AgentTeams)</a:t>
+              <a:t>索克差异化定位:不做"效果图工具",而是家装全流程多 Agent 自主协同 + 标准 MCP/A2A 基础设施 —— 真实业务闭环(80 路由模块/140 模型/25 Agent/112 Service)+ 开放协议 + 可编排协同层(AgentTeams)</a:t>
             </a:r>
             <a:endParaRPr lang="en-US" sz="1150" dirty="0"/>
           </a:p>
@@ -22343,7 +22343,7 @@
                 <a:ea typeface="Microsoft YaHei" pitchFamily="34" charset="-122"/>
                 <a:cs typeface="Microsoft YaHei" pitchFamily="34" charset="-120"/>
               </a:rPr>
-              <a:t>* 诚实边界:质检真实 CV 已启用(`real_cv_quality_enabled=True`),不可用时诚实降级到规则 mock 并标注 `cv_mode="mock"`;VR 渲染、AI 渲染 L1/L2 为标注降级;前沿功能(材料溯源 HENF / AI 工地监理 / 局改快装 / 米家生态+L1-L5 / 方案 LLM 深化 / BOM 版本+几何算量)均已实装(实测 80 路由模块/140 模型/2442 测试基线全绿)</a:t>
+              <a:t>* 诚实边界:质检真实 CV 已启用(`real_cv_quality_enabled=True`),不可用时诚实降级到规则 mock 并标注 `cv_mode="mock"`;VR 渲染、AI 渲染 L1/L2 为标注降级;前沿功能(材料溯源 HENF / AI 工地监理 / 局改快装 / 米家生态+L1-L5 / 方案 LLM 深化 / BOM 版本+几何算量)均已实装(实测 80 路由模块/140 模型/2454 测试基线全绿)</a:t>
             </a:r>
             <a:endParaRPr lang="en-US" sz="1050" dirty="0"/>
           </a:p>
@@ -23624,7 +23624,7 @@
                 <a:ea typeface="Microsoft YaHei" pitchFamily="34" charset="-122"/>
                 <a:cs typeface="Microsoft YaHei" pitchFamily="34" charset="-120"/>
               </a:rPr>
-              <a:t>诚实降级原则:所有前沿功能带 feature flag + 来源标注(db / rule_based / empirical / mock),禁用硬编码假数据 —— 呼应赛题"不伪装能力"与白皮书空间智能(实测 80 路由模块/140 模型/25 Agent/111 Service)</a:t>
+              <a:t>诚实降级原则:所有前沿功能带 feature flag + 来源标注(db / rule_based / empirical / mock),禁用硬编码假数据 —— 呼应赛题"不伪装能力"与白皮书空间智能(实测 80 路由模块/140 模型/25 Agent/112 Service)</a:t>
             </a:r>
             <a:endParaRPr lang="en-US" sz="1100" dirty="0"/>
           </a:p>
